--- a/public/fun/pack/pptx/reviewpro/보장점검양식프리미엄_49_부모님점검_스노우포레스트.pptx
+++ b/public/fun/pack/pptx/reviewpro/보장점검양식프리미엄_49_부모님점검_스노우포레스트.pptx
@@ -112,12 +112,12 @@
   <p:extLst>
     <p:ext uri="{521415D9-36F7-43E2-AB2F-B90AF26B5E84}">
       <p14:sectionLst xmlns:p14="http://schemas.microsoft.com/office/powerpoint/2010/main">
-        <p14:section name="시작" id="{FAFF611C-8259-41F4-A7F1-B94E3672A193}">
+        <p14:section name="시작" id="{BA9D0839-104E-4DEF-A404-9AB28099D1DF}">
           <p14:sldIdLst>
             <p14:sldId id="256"/>
           </p14:sldIdLst>
         </p14:section>
-        <p14:section name="본문" id="{D2817546-C2E1-49EF-97D5-AB38F9EFA075}">
+        <p14:section name="본문" id="{9F445501-37BF-4756-8B50-EF915832BC8C}">
           <p14:sldIdLst>
             <p14:sldId id="257"/>
             <p14:sldId id="258"/>
@@ -1493,7 +1493,7 @@
             </a:lvl1pPr>
           </a:lstStyle>
           <a:p>
-            <a:fld id="{26E7A8AE-25E1-49CE-B169-A4EB22703B88}" type="slidenum">
+            <a:fld id="{6A8AC9CB-9932-4EFA-80AB-50F2A3D67F02}" type="slidenum">
               <a:rPr lang="en-US"/>
               <a:t>‹#›</a:t>
             </a:fld>
@@ -2174,7 +2174,7 @@
             </a:lvl1pPr>
           </a:lstStyle>
           <a:p>
-            <a:fld id="{6390AABE-1C3C-4DBE-A476-A5B5FEBDB627}" type="slidenum">
+            <a:fld id="{EC225036-C2EE-4F0A-A426-2674D0E8A455}" type="slidenum">
               <a:rPr lang="en-US"/>
               <a:t>‹#›</a:t>
             </a:fld>
@@ -2923,7 +2923,7 @@
             </a:lvl1pPr>
           </a:lstStyle>
           <a:p>
-            <a:fld id="{0A485A56-4AE6-4BD8-A094-C920A9DCB2B1}" type="slidenum">
+            <a:fld id="{B46CE888-9AA8-46EE-A1D3-40514F83FF39}" type="slidenum">
               <a:rPr lang="en-US"/>
               <a:t>‹#›</a:t>
             </a:fld>
@@ -3808,7 +3808,7 @@
           <a:p>
             <a:r>
               <a:rPr lang="ko-KR"/>
-              <a:t>부모님 점검 · 0000. 00. 00</a:t>
+              <a:t>부모님 점검 · 날짜 입력</a:t>
             </a:r>
           </a:p>
           <a:p>
@@ -3921,7 +3921,7 @@
           <a:bodyPr/>
           <a:lstStyle/>
           <a:p>
-            <a:fld id="{38E4C3D4-A408-4CB7-968D-F4A6B5E54FAF}" type="slidenum">
+            <a:fld id="{6ABDD7BB-6A2C-4FBC-B1C8-5C17B23872DD}" type="slidenum">
               <a:rPr lang="en-US"/>
               <a:t>‹#›</a:t>
             </a:fld>
@@ -4656,7 +4656,7 @@
           <a:bodyPr/>
           <a:lstStyle/>
           <a:p>
-            <a:fld id="{C6C8AF59-9785-4B5F-B962-C8A0A2078082}" type="slidenum">
+            <a:fld id="{8E1EBCDB-D068-4123-BEA5-F864B15D7635}" type="slidenum">
               <a:rPr lang="en-US"/>
               <a:t>‹#›</a:t>
             </a:fld>
@@ -6184,7 +6184,7 @@
           <a:bodyPr/>
           <a:lstStyle/>
           <a:p>
-            <a:fld id="{3FA5AD9A-DDFA-48C0-A666-34CF7036EAB1}" type="slidenum">
+            <a:fld id="{88E3D323-1C19-4A0D-AD35-29ED881CB509}" type="slidenum">
               <a:rPr lang="en-US"/>
               <a:t>‹#›</a:t>
             </a:fld>
@@ -7756,7 +7756,7 @@
           <a:bodyPr/>
           <a:lstStyle/>
           <a:p>
-            <a:fld id="{A070B436-8509-4EFB-A46B-E76B8980C477}" type="slidenum">
+            <a:fld id="{A2B4FD8B-D180-45E1-88A5-8CC67BB4DB1D}" type="slidenum">
               <a:rPr lang="en-US"/>
               <a:t>‹#›</a:t>
             </a:fld>
@@ -8712,7 +8712,7 @@
           <a:bodyPr/>
           <a:lstStyle/>
           <a:p>
-            <a:fld id="{2F9694D8-B0B8-4097-BFA6-1AA36CD6FBE7}" type="slidenum">
+            <a:fld id="{629E937B-E16D-4EF4-93DC-139F65123E08}" type="slidenum">
               <a:rPr lang="en-US"/>
               <a:t>‹#›</a:t>
             </a:fld>
